--- a/output/presentation/수정본.pptx
+++ b/output/presentation/수정본.pptx
@@ -4996,13 +4996,18 @@
               </a:defRPr>
             </a:pPr>
             <a:r>
-              <a:rPr sz="1800" b="1">
+              <a:rPr lang="en-US" sz="1800" b="1">
                 <a:solidFill>
                   <a:srgbClr val="667085"/>
                 </a:solidFill>
               </a:rPr>
-              <a:t>서비스 계층</a:t>
-            </a:r>
+              <a:t>Supabase</a:t>
+            </a:r>
+            <a:endParaRPr sz="1800" b="1">
+              <a:solidFill>
+                <a:srgbClr val="667085"/>
+              </a:solidFill>
+            </a:endParaRPr>
           </a:p>
         </p:txBody>
       </p:sp>
@@ -8751,7 +8756,7 @@
             </a:r>
           </a:p>
           <a:p>
-            <a:pPr algn="l">
+            <a:pPr>
               <a:defRPr sz="1425" b="0">
                 <a:solidFill>
                   <a:srgbClr val="101828"/>
@@ -8764,8 +8769,71 @@
                   <a:srgbClr val="101828"/>
                 </a:solidFill>
               </a:rPr>
-              <a:t>• 저장 기록과 준비 태스크</a:t>
-            </a:r>
+              <a:t>• </a:t>
+            </a:r>
+            <a:r>
+              <a:rPr lang="ko-KR" altLang="en-US" sz="1425">
+                <a:solidFill>
+                  <a:srgbClr val="101828"/>
+                </a:solidFill>
+              </a:rPr>
+              <a:t>사용자 계정</a:t>
+            </a:r>
+            <a:r>
+              <a:rPr lang="en-US" altLang="ko-KR" sz="1425">
+                <a:solidFill>
+                  <a:srgbClr val="101828"/>
+                </a:solidFill>
+              </a:rPr>
+              <a:t>·DB·</a:t>
+            </a:r>
+            <a:r>
+              <a:rPr lang="ko-KR" altLang="en-US" sz="1425">
+                <a:solidFill>
+                  <a:srgbClr val="101828"/>
+                </a:solidFill>
+              </a:rPr>
+              <a:t>알림 연결</a:t>
+            </a:r>
+          </a:p>
+          <a:p>
+            <a:pPr>
+              <a:defRPr sz="1425" b="0">
+                <a:solidFill>
+                  <a:srgbClr val="101828"/>
+                </a:solidFill>
+              </a:defRPr>
+            </a:pPr>
+            <a:r>
+              <a:rPr lang="en-US" altLang="ko-KR" sz="1425">
+                <a:solidFill>
+                  <a:srgbClr val="101828"/>
+                </a:solidFill>
+              </a:rPr>
+              <a:t>• </a:t>
+            </a:r>
+            <a:r>
+              <a:rPr lang="ko-KR" altLang="en-US" sz="1425">
+                <a:solidFill>
+                  <a:srgbClr val="101828"/>
+                </a:solidFill>
+              </a:rPr>
+              <a:t>동적 사이트 처리</a:t>
+            </a:r>
+          </a:p>
+          <a:p>
+            <a:pPr>
+              <a:defRPr sz="1425" b="0">
+                <a:solidFill>
+                  <a:srgbClr val="101828"/>
+                </a:solidFill>
+              </a:defRPr>
+            </a:pPr>
+            <a:endParaRPr lang="ko-KR" altLang="en-US" sz="1425">
+              <a:solidFill>
+                <a:srgbClr val="101828"/>
+              </a:solidFill>
+            </a:endParaRPr>
           </a:p>
         </p:txBody>
       </p:sp>
@@ -8902,7 +8970,7 @@
                   <a:srgbClr val="101828"/>
                 </a:solidFill>
               </a:rPr>
-              <a:t>1. 동적 사이트와 첨부파일 본문 처리</a:t>
+              <a:t>1. 첨부파일 본문 처리</a:t>
             </a:r>
           </a:p>
           <a:p>
@@ -8921,6 +8989,11 @@
               </a:rPr>
               <a:t>2. 사이트별 파서와 자동 수집 스케줄</a:t>
             </a:r>
+            <a:endParaRPr lang="en-US" sz="1425" b="0">
+              <a:solidFill>
+                <a:srgbClr val="101828"/>
+              </a:solidFill>
+            </a:endParaRPr>
           </a:p>
           <a:p>
             <a:pPr algn="l">
@@ -8931,29 +9004,20 @@
               </a:defRPr>
             </a:pPr>
             <a:r>
+              <a:rPr lang="en-US" sz="1425">
+                <a:solidFill>
+                  <a:srgbClr val="101828"/>
+                </a:solidFill>
+              </a:rPr>
+              <a:t>3</a:t>
+            </a:r>
+            <a:r>
               <a:rPr sz="1425" b="0">
                 <a:solidFill>
                   <a:srgbClr val="101828"/>
                 </a:solidFill>
               </a:rPr>
-              <a:t>3. 사용자 계정·DB·알림 연결</a:t>
-            </a:r>
-          </a:p>
-          <a:p>
-            <a:pPr algn="l">
-              <a:defRPr sz="1425" b="0">
-                <a:solidFill>
-                  <a:srgbClr val="101828"/>
-                </a:solidFill>
-              </a:defRPr>
-            </a:pPr>
-            <a:r>
-              <a:rPr sz="1425" b="0">
-                <a:solidFill>
-                  <a:srgbClr val="101828"/>
-                </a:solidFill>
-              </a:rPr>
-              <a:t>4. 실제 공고 기반 정확도 평가</a:t>
+              <a:t>. 실제 공고 기반 정확도 평가</a:t>
             </a:r>
           </a:p>
         </p:txBody>
